--- a/media/resources/files/Onduktar_BoluuXO_ZTUTQ6x.pptx
+++ b/media/resources/files/Onduktar_BoluuXO_ZTUTQ6x.pptx
@@ -3893,7 +3893,7 @@
                 <a:ea typeface="+mn-ea"/>
                 <a:cs typeface="Arial" panose="020B0604020202020204" pitchFamily="34" charset="0"/>
               </a:rPr>
-              <a:t>Мугалим үчүн жооп баракчасы жана таратма материалдар камтылган.</a:t>
+              <a:t>Мугалим үчүн жооп барагы жана таратма материалдар бар.</a:t>
             </a:r>
           </a:p>
           <a:p>
@@ -3962,7 +3962,7 @@
                 <a:ea typeface="+mn-ea"/>
                 <a:cs typeface="Arial" panose="020B0604020202020204" pitchFamily="34" charset="0"/>
               </a:rPr>
-              <a:t>Кайсы команда туура жооп бергенине жараша '</a:t>
+              <a:t>Туура жооп берген командага жараша «</a:t>
             </a:r>
             <a:r>
               <a:rPr kumimoji="0" lang="en-GB" sz="2000" b="0" i="0" u="sng" strike="noStrike" kern="1200" cap="none" spc="0" normalizeH="0" baseline="0" noProof="0" dirty="0">
@@ -3979,7 +3979,7 @@
                 <a:ea typeface="+mn-ea"/>
                 <a:cs typeface="Arial" panose="020B0604020202020204" pitchFamily="34" charset="0"/>
               </a:rPr>
-              <a:t>X' </a:t>
+              <a:t>X» </a:t>
             </a:r>
             <a:r>
               <a:rPr kumimoji="0" lang="ru-RU" sz="2000" b="0" i="0" u="sng" strike="noStrike" kern="1200" cap="none" spc="0" normalizeH="0" baseline="0" noProof="0" dirty="0">
@@ -3996,7 +3996,7 @@
                 <a:ea typeface="+mn-ea"/>
                 <a:cs typeface="Arial" panose="020B0604020202020204" pitchFamily="34" charset="0"/>
               </a:rPr>
-              <a:t>же '</a:t>
+              <a:t>же «</a:t>
             </a:r>
             <a:r>
               <a:rPr kumimoji="0" lang="en-GB" sz="2000" b="0" i="0" u="sng" strike="noStrike" kern="1200" cap="none" spc="0" normalizeH="0" baseline="0" noProof="0" dirty="0">
@@ -4013,7 +4013,7 @@
                 <a:ea typeface="+mn-ea"/>
                 <a:cs typeface="Arial" panose="020B0604020202020204" pitchFamily="34" charset="0"/>
               </a:rPr>
-              <a:t>O' </a:t>
+              <a:t>O» </a:t>
             </a:r>
             <a:r>
               <a:rPr kumimoji="0" lang="ru-RU" sz="2000" b="0" i="0" u="sng" strike="noStrike" kern="1200" cap="none" spc="0" normalizeH="0" baseline="0" noProof="0" dirty="0">
@@ -4030,7 +4030,7 @@
                 <a:ea typeface="+mn-ea"/>
                 <a:cs typeface="Arial" panose="020B0604020202020204" pitchFamily="34" charset="0"/>
               </a:rPr>
-              <a:t>баскычын басыңыз/тийип коюңуз</a:t>
+              <a:t>баскычын басыңыз</a:t>
             </a:r>
             <a:r>
               <a:rPr kumimoji="0" lang="en-GB" sz="2000" b="0" i="0" u="none" strike="noStrike" kern="1200" cap="none" spc="0" normalizeH="0" baseline="0" noProof="0" dirty="0">
@@ -4556,7 +4556,7 @@
             <a:pPr algn="ctr"/>
             <a:r>
               <a:rPr lang="en-GB" sz="4400" dirty="0"/>
-              <a:t>4 ÷ 0.2</a:t>
+              <a:t>4 ÷ 0,2</a:t>
             </a:r>
           </a:p>
         </p:txBody>
@@ -4597,7 +4597,7 @@
             <a:pPr algn="ctr"/>
             <a:r>
               <a:rPr lang="en-GB" sz="4400" dirty="0"/>
-              <a:t>18 ÷ 0.18</a:t>
+              <a:t>18 ÷ 0,18</a:t>
             </a:r>
           </a:p>
         </p:txBody>
@@ -4638,7 +4638,7 @@
             <a:pPr algn="ctr"/>
             <a:r>
               <a:rPr lang="en-GB" sz="4400" dirty="0"/>
-              <a:t>14 ÷ 0.5</a:t>
+              <a:t>14 ÷ 0,5</a:t>
             </a:r>
           </a:p>
         </p:txBody>
@@ -4679,7 +4679,7 @@
             <a:pPr algn="ctr"/>
             <a:r>
               <a:rPr lang="en-GB" sz="4400" dirty="0"/>
-              <a:t>7.8 ÷ 0.6</a:t>
+              <a:t>7,8 ÷ 0,6</a:t>
             </a:r>
           </a:p>
         </p:txBody>
@@ -4720,11 +4720,11 @@
             <a:pPr algn="ctr"/>
             <a:r>
               <a:rPr lang="en-GB" sz="4400"/>
-              <a:t>92.3 </a:t>
+              <a:t>92,3 </a:t>
             </a:r>
             <a:r>
               <a:rPr lang="en-GB" sz="4400" dirty="0"/>
-              <a:t>÷ 1.3</a:t>
+              <a:t>÷ 1,3</a:t>
             </a:r>
           </a:p>
         </p:txBody>
@@ -4765,7 +4765,7 @@
             <a:pPr algn="ctr"/>
             <a:r>
               <a:rPr lang="en-GB" sz="4400" dirty="0"/>
-              <a:t>8.4 ÷ 1.2</a:t>
+              <a:t>8,4 ÷ 1,2</a:t>
             </a:r>
           </a:p>
         </p:txBody>
@@ -4806,7 +4806,7 @@
             <a:pPr algn="ctr"/>
             <a:r>
               <a:rPr lang="en-GB" sz="4400" dirty="0"/>
-              <a:t>2.1 ÷ 0.7</a:t>
+              <a:t>2,1 ÷ 0,7</a:t>
             </a:r>
           </a:p>
         </p:txBody>
@@ -4847,7 +4847,7 @@
             <a:pPr algn="ctr"/>
             <a:r>
               <a:rPr lang="en-GB" sz="4400" dirty="0"/>
-              <a:t>21.6 ÷ 0.9</a:t>
+              <a:t>21,6 ÷ 0,9</a:t>
             </a:r>
           </a:p>
         </p:txBody>
@@ -4888,7 +4888,7 @@
             <a:pPr algn="ctr"/>
             <a:r>
               <a:rPr lang="en-GB" sz="4400" dirty="0"/>
-              <a:t>2.4 ÷ 2</a:t>
+              <a:t>2,4 ÷ 2</a:t>
             </a:r>
           </a:p>
         </p:txBody>
